--- a/curso_es/pptx/S29.pptx
+++ b/curso_es/pptx/S29.pptx
@@ -5274,7 +5274,7 @@
                 </a:solidFill>
                 <a:latin typeface="Nunito Sans"/>
               </a:rPr>
-              <a:t>Suena la alarma del simulacro. El profesor dice: «En fila, por la escalera B». Todos salen en fila. Maialen también, sin discutir.</a:t>
+              <a:t>Suena la alarma del simulacro. El profesor dice: «En fila, por la escalera B». Todos salen en fila. Una chica también, sin discutir.</a:t>
             </a:r>
           </a:p>
         </p:txBody>
